--- a/docs/SIH2026-DevUp-SIH26175-DepthWizard-C.pptx
+++ b/docs/SIH2026-DevUp-SIH26175-DepthWizard-C.pptx
@@ -8556,7 +8556,7 @@
                 </a:solidFill>
                 <a:latin typeface="Segoe UI"/>
               </a:rPr>
-              <a:t>Depth Anything V2 fine-tuned on DFC2019 LiDAR. GeoTIFF out, metadata or not.</a:t>
+              <a:t>Depth Anything V2 fine-tuned on DFC2019 + GAMUS LiDAR. GeoTIFF out, metadata or not.</a:t>
             </a:r>
           </a:p>
         </p:txBody>
@@ -9536,7 +9536,7 @@
                 </a:solidFill>
                 <a:latin typeface="Segoe UI"/>
               </a:rPr>
-              <a:t>No GPU: 509 ms per tile. The viewer is one 15 MB HTML file that opens from disk.</a:t>
+              <a:t>No GPU: 536 ms per tile. The viewer is one 15 MB HTML file that opens from disk.</a:t>
             </a:r>
           </a:p>
         </p:txBody>
@@ -11821,7 +11821,7 @@
                 <a:latin typeface="Segoe UI"/>
               </a:rPr>
               <a:t>Fine-tuned on
-DFC2019 LiDAR</a:t>
+DFC2019 + GAMUS</a:t>
             </a:r>
           </a:p>
         </p:txBody>
@@ -14512,7 +14512,7 @@
                 </a:solidFill>
                 <a:latin typeface="Segoe UI"/>
               </a:rPr>
-              <a:t>ECE 0.077, sigma-vs-error rank correlation +0.829 on held-out tiles.</a:t>
+              <a:t>ECE 0.063, sigma-vs-error rank correlation +0.866 on held-out tiles.</a:t>
             </a:r>
           </a:p>
         </p:txBody>
@@ -14708,7 +14708,7 @@
                 </a:solidFill>
                 <a:latin typeface="Segoe UI"/>
               </a:rPr>
-              <a:t>ONNX agrees with PyTorch to 0.0010 cm over 804,972 inputs; int8 costs 0.161 m.</a:t>
+              <a:t>ONNX agrees with PyTorch to 0.0007 cm over 804,972 inputs; int8 costs 0.030 m.</a:t>
             </a:r>
           </a:p>
         </p:txBody>
@@ -20873,7 +20873,7 @@
                 </a:solidFill>
                 <a:latin typeface="Segoe UI"/>
               </a:rPr>
-              <a:t>509 ms per tile on a laptop CPU</a:t>
+              <a:t>536 ms per tile on a laptop CPU</a:t>
             </a:r>
           </a:p>
         </p:txBody>
@@ -22169,7 +22169,7 @@
                 </a:solidFill>
                 <a:latin typeface="Segoe UI Semibold"/>
               </a:rPr>
-              <a:t>ISRO Bhoonidhi  </a:t>
+              <a:t>GAMUS  </a:t>
             </a:r>
             <a:r>
               <a:rPr sz="910" b="0" i="0">
@@ -22178,7 +22178,7 @@
                 </a:solidFill>
                 <a:latin typeface="Segoe UI"/>
               </a:rPr>
-              <a:t>Registered. CartoDEM 30 m and LISS-4 are the free tiers.</a:t>
+              <a:t>ISRO's recommended set. 6,204 tiles, 0.33 m, DC and Philadelphia.</a:t>
             </a:r>
           </a:p>
         </p:txBody>
@@ -22751,7 +22751,7 @@
                 </a:solidFill>
                 <a:latin typeface="Segoe UI"/>
               </a:rPr>
-              <a:t>More tall examples? No — training tops out at 82.8 m.</a:t>
+              <a:t>Data, not capacity — and GAMUS then proved it.</a:t>
             </a:r>
           </a:p>
         </p:txBody>
@@ -25620,7 +25620,7 @@
         <p:spPr>
           <a:xfrm>
             <a:off x="8101584" y="5413248"/>
-            <a:ext cx="2569463" cy="512064"/>
+            <a:ext cx="2569463" cy="841248"/>
           </a:xfrm>
           <a:prstGeom prst="rect">
             <a:avLst/>
@@ -25648,7 +25648,7 @@
                 </a:solidFill>
                 <a:latin typeface="Franklin Gothic Demi"/>
               </a:rPr>
-              <a:t>3.667 m</a:t>
+              <a:t>3.464 m</a:t>
             </a:r>
             <a:r>
               <a:rPr sz="910" b="0" i="0">
@@ -25657,7 +25657,26 @@
                 </a:solidFill>
                 <a:latin typeface="Segoe UI"/>
               </a:rPr>
-              <a:t>  per-building RMSE against airborne LiDAR, versus 5.9 m published for Asia. Scored on 3,090 buildings across 80 held-out tiles.</a:t>
+              <a:t>  per-building RMSE against airborne LiDAR, versus 5.9 m published for Asia. Scored on 3,090 buildings across 80 held-out tiles.
+</a:t>
+            </a:r>
+            <a:r>
+              <a:rPr sz="910" b="1" i="0">
+                <a:solidFill>
+                  <a:srgbClr val="141B22"/>
+                </a:solidFill>
+                <a:latin typeface="Segoe UI Semibold"/>
+              </a:rPr>
+              <a:t>Where it fails: </a:t>
+            </a:r>
+            <a:r>
+              <a:rPr sz="910" b="0" i="0">
+                <a:solidFill>
+                  <a:srgbClr val="2A3540"/>
+                </a:solidFill>
+                <a:latin typeface="Segoe UI"/>
+              </a:rPr>
+              <a:t>buildings above 20 m are under-called by 15.6 m. We pre-registered −13 m and missed it. GAMUS improved it significantly (p = 0.0002); no open data at this resolution reaches 50 m.</a:t>
             </a:r>
           </a:p>
         </p:txBody>
